--- a/config/base-template.pptx
+++ b/config/base-template.pptx
@@ -8471,8 +8471,8 @@
         </p:blipFill>
         <p:spPr>
           <a:xfrm>
-            <a:off x="646733" y="4033689"/>
-            <a:ext cx="188268" cy="150614"/>
+            <a:off x="665560" y="4033689"/>
+            <a:ext cx="150614" cy="150614"/>
           </a:xfrm>
           <a:prstGeom prst="rect">
             <a:avLst/>
@@ -11481,8 +11481,8 @@
         </p:blipFill>
         <p:spPr>
           <a:xfrm>
-            <a:off x="637877" y="2988915"/>
-            <a:ext cx="177180" cy="141759"/>
+            <a:off x="655587" y="2988915"/>
+            <a:ext cx="141759" cy="141759"/>
           </a:xfrm>
           <a:prstGeom prst="rect">
             <a:avLst/>

--- a/config/base-template.pptx
+++ b/config/base-template.pptx
@@ -18,6 +18,8 @@
     <p:sldId id="265" r:id="rId11"/>
     <p:sldId id="266" r:id="rId12"/>
     <p:sldId id="267" r:id="rId13"/>
+    <p:sldId id="269" r:id="rId64"/>
+    <p:sldId id="270" r:id="rId65"/>
   </p:sldIdLst>
   <p:notesMasterIdLst>
     <p:notesMasterId r:id="rId55"/>
@@ -6584,6 +6586,1114 @@
 </p:sld>
 </file>
 
+<file path=ppt/slides/slide14.xml><?xml version="1.0" encoding="utf-8"?>
+<p:sld xmlns:a="http://schemas.openxmlformats.org/drawingml/2006/main" xmlns:r="http://schemas.openxmlformats.org/officeDocument/2006/relationships" xmlns:p="http://schemas.openxmlformats.org/presentationml/2006/main">
+  <p:cSld>
+    <p:spTree>
+      <p:nvGrpSpPr>
+        <p:cNvPr id="1" name=""/>
+        <p:cNvGrpSpPr/>
+        <p:nvPr/>
+      </p:nvGrpSpPr>
+      <p:grpSpPr>
+        <a:xfrm>
+          <a:off x="0" y="0"/>
+          <a:ext cx="0" cy="0"/>
+          <a:chOff x="0" y="0"/>
+          <a:chExt cx="0" cy="0"/>
+        </a:xfrm>
+      </p:grpSpPr>
+      <p:sp>
+        <p:nvSpPr>
+          <p:cNvPr id="2" name="Section pill"/>
+          <p:cNvSpPr/>
+          <p:nvPr/>
+        </p:nvSpPr>
+        <p:spPr>
+          <a:xfrm>
+            <a:off x="384048" y="292608"/>
+            <a:ext cx="3840480" cy="274320"/>
+          </a:xfrm>
+          <a:prstGeom prst="roundRect">
+            <a:avLst>
+              <a:gd name="adj" fmla="val 2100"/>
+            </a:avLst>
+          </a:prstGeom>
+          <a:solidFill>
+            <a:srgbClr val="F9D2D6"/>
+          </a:solidFill>
+          <a:ln>
+            <a:noFill/>
+          </a:ln>
+        </p:spPr>
+        <p:txBody>
+          <a:bodyPr lIns="0" tIns="0" rIns="0" bIns="0" wrap="square" anchor="t"/>
+          <a:lstStyle/>
+          <a:p>
+            <a:pPr algn="l"/>
+            <a:r>
+              <a:rPr lang="es-ES" sz="950" dirty="0">
+                <a:solidFill>
+                  <a:srgbClr val="1F1E1E"/>
+                </a:solidFill>
+                <a:latin typeface="Roboto Mono Medium"/>
+              </a:rPr>
+              <a:t>TEMPLATE — CARD-ROW (LEAD + 3 CARDS)</a:t>
+            </a:r>
+          </a:p>
+        </p:txBody>
+      </p:sp>
+      <p:sp>
+        <p:nvSpPr>
+          <p:cNvPr id="3" name="Title"/>
+          <p:cNvSpPr/>
+          <p:nvPr/>
+        </p:nvSpPr>
+        <p:spPr>
+          <a:xfrm>
+            <a:off x="493776" y="777240"/>
+            <a:ext cx="8147304" cy="960120"/>
+          </a:xfrm>
+          <a:prstGeom prst="rect">
+            <a:avLst/>
+          </a:prstGeom>
+          <a:noFill/>
+          <a:ln>
+            <a:noFill/>
+          </a:ln>
+        </p:spPr>
+        <p:txBody>
+          <a:bodyPr lIns="0" tIns="0" rIns="0" bIns="0" wrap="square" anchor="t"/>
+          <a:lstStyle/>
+          <a:p>
+            <a:pPr algn="l"/>
+            <a:r>
+              <a:rPr lang="es-ES" sz="2800" dirty="0">
+                <a:solidFill>
+                  <a:srgbClr val="1F1E1E"/>
+                </a:solidFill>
+                <a:latin typeface="Roboto Mono Medium"/>
+              </a:rPr>
+              <a:t>{{Slide title (h2) 14}}</a:t>
+            </a:r>
+          </a:p>
+        </p:txBody>
+      </p:sp>
+      <p:sp>
+        <p:nvSpPr>
+          <p:cNvPr id="4" name="Lead paragraph"/>
+          <p:cNvSpPr/>
+          <p:nvPr/>
+        </p:nvSpPr>
+        <p:spPr>
+          <a:xfrm>
+            <a:off x="493776" y="1874520"/>
+            <a:ext cx="8147304" cy="777240"/>
+          </a:xfrm>
+          <a:prstGeom prst="rect">
+            <a:avLst/>
+          </a:prstGeom>
+          <a:noFill/>
+          <a:ln>
+            <a:noFill/>
+          </a:ln>
+        </p:spPr>
+        <p:txBody>
+          <a:bodyPr lIns="0" tIns="0" rIns="0" bIns="0" wrap="square" anchor="t"/>
+          <a:lstStyle/>
+          <a:p>
+            <a:pPr algn="l"/>
+            <a:r>
+              <a:rPr lang="es-ES" sz="1200" dirty="0">
+                <a:solidFill>
+                  <a:srgbClr val="3B3535"/>
+                </a:solidFill>
+                <a:latin typeface="Roboto"/>
+              </a:rPr>
+              <a:t>{{Lead paragraph 14 — 1–2 sentences framing the parallel concepts that follow as a row of equal-width cards. Source spec: §7.4.}}</a:t>
+            </a:r>
+          </a:p>
+        </p:txBody>
+      </p:sp>
+      <p:sp>
+        <p:nvSpPr>
+          <p:cNvPr id="5" name="Card 1 outer"/>
+          <p:cNvSpPr/>
+          <p:nvPr/>
+        </p:nvSpPr>
+        <p:spPr>
+          <a:xfrm>
+            <a:off x="493776" y="2926080"/>
+            <a:ext cx="2581656" cy="1691640"/>
+          </a:xfrm>
+          <a:prstGeom prst="roundRect">
+            <a:avLst>
+              <a:gd name="adj" fmla="val 340"/>
+            </a:avLst>
+          </a:prstGeom>
+          <a:solidFill>
+            <a:srgbClr val="F2EEEE"/>
+          </a:solidFill>
+          <a:ln>
+            <a:noFill/>
+          </a:ln>
+        </p:spPr>
+        <p:txBody>
+          <a:bodyPr lIns="0" tIns="0" rIns="0" bIns="0" wrap="square"/>
+          <a:lstStyle/>
+          <a:p/>
+        </p:txBody>
+      </p:sp>
+      <p:sp>
+        <p:nvSpPr>
+          <p:cNvPr id="6" name="Card 1 icon chip"/>
+          <p:cNvSpPr/>
+          <p:nvPr/>
+        </p:nvSpPr>
+        <p:spPr>
+          <a:xfrm>
+            <a:off x="676656" y="3108960"/>
+            <a:ext cx="384048" cy="384048"/>
+          </a:xfrm>
+          <a:prstGeom prst="ellipse">
+            <a:avLst/>
+          </a:prstGeom>
+          <a:solidFill>
+            <a:srgbClr val="DA1B2E"/>
+          </a:solidFill>
+          <a:ln>
+            <a:noFill/>
+          </a:ln>
+        </p:spPr>
+        <p:txBody>
+          <a:bodyPr lIns="0" tIns="0" rIns="0" bIns="0" wrap="square"/>
+          <a:lstStyle/>
+          <a:p/>
+        </p:txBody>
+      </p:sp>
+      <p:sp>
+        <p:nvSpPr>
+          <p:cNvPr id="7" name="Card 1 icon glyph (stand-in)"/>
+          <p:cNvSpPr/>
+          <p:nvPr/>
+        </p:nvSpPr>
+        <p:spPr>
+          <a:xfrm>
+            <a:off x="772668" y="3204972"/>
+            <a:ext cx="192024" cy="192024"/>
+          </a:xfrm>
+          <a:prstGeom prst="ellipse">
+            <a:avLst/>
+          </a:prstGeom>
+          <a:noFill/>
+          <a:ln w="19050">
+            <a:solidFill>
+              <a:srgbClr val="FFFFFF"/>
+            </a:solidFill>
+          </a:ln>
+        </p:spPr>
+        <p:txBody>
+          <a:bodyPr lIns="0" tIns="0" rIns="0" bIns="0" wrap="square"/>
+          <a:lstStyle/>
+          <a:p/>
+        </p:txBody>
+      </p:sp>
+      <p:sp>
+        <p:nvSpPr>
+          <p:cNvPr id="8" name="Card 1 heading"/>
+          <p:cNvSpPr/>
+          <p:nvPr/>
+        </p:nvSpPr>
+        <p:spPr>
+          <a:xfrm>
+            <a:off x="676656" y="3657600"/>
+            <a:ext cx="2215896" cy="274320"/>
+          </a:xfrm>
+          <a:prstGeom prst="rect">
+            <a:avLst/>
+          </a:prstGeom>
+          <a:noFill/>
+          <a:ln>
+            <a:noFill/>
+          </a:ln>
+        </p:spPr>
+        <p:txBody>
+          <a:bodyPr lIns="0" tIns="0" rIns="0" bIns="0" wrap="square" anchor="t"/>
+          <a:lstStyle/>
+          <a:p>
+            <a:pPr algn="l"/>
+            <a:r>
+              <a:rPr lang="es-ES" sz="1350" dirty="0">
+                <a:solidFill>
+                  <a:srgbClr val="1F1E1E"/>
+                </a:solidFill>
+                <a:latin typeface="Roboto Mono Medium"/>
+              </a:rPr>
+              <a:t>{{Card heading 1}}</a:t>
+            </a:r>
+          </a:p>
+        </p:txBody>
+      </p:sp>
+      <p:sp>
+        <p:nvSpPr>
+          <p:cNvPr id="9" name="Card 1 body"/>
+          <p:cNvSpPr/>
+          <p:nvPr/>
+        </p:nvSpPr>
+        <p:spPr>
+          <a:xfrm>
+            <a:off x="676656" y="3977640"/>
+            <a:ext cx="2215896" cy="548640"/>
+          </a:xfrm>
+          <a:prstGeom prst="rect">
+            <a:avLst/>
+          </a:prstGeom>
+          <a:noFill/>
+          <a:ln>
+            <a:noFill/>
+          </a:ln>
+        </p:spPr>
+        <p:txBody>
+          <a:bodyPr lIns="0" tIns="0" rIns="0" bIns="0" wrap="square" anchor="t"/>
+          <a:lstStyle/>
+          <a:p>
+            <a:pPr algn="l"/>
+            <a:r>
+              <a:rPr lang="es-ES" sz="1100" dirty="0">
+                <a:solidFill>
+                  <a:srgbClr val="3B3535"/>
+                </a:solidFill>
+                <a:latin typeface="Roboto"/>
+              </a:rPr>
+              <a:t>{{Card body 1 — 1–2 short sentences.}}</a:t>
+            </a:r>
+          </a:p>
+        </p:txBody>
+      </p:sp>
+      <p:sp>
+        <p:nvSpPr>
+          <p:cNvPr id="10" name="Card 2 outer"/>
+          <p:cNvSpPr/>
+          <p:nvPr/>
+        </p:nvSpPr>
+        <p:spPr>
+          <a:xfrm>
+            <a:off x="3276600" y="2926080"/>
+            <a:ext cx="2581656" cy="1691640"/>
+          </a:xfrm>
+          <a:prstGeom prst="roundRect">
+            <a:avLst>
+              <a:gd name="adj" fmla="val 340"/>
+            </a:avLst>
+          </a:prstGeom>
+          <a:solidFill>
+            <a:srgbClr val="F2EEEE"/>
+          </a:solidFill>
+          <a:ln>
+            <a:noFill/>
+          </a:ln>
+        </p:spPr>
+        <p:txBody>
+          <a:bodyPr lIns="0" tIns="0" rIns="0" bIns="0" wrap="square"/>
+          <a:lstStyle/>
+          <a:p/>
+        </p:txBody>
+      </p:sp>
+      <p:sp>
+        <p:nvSpPr>
+          <p:cNvPr id="11" name="Card 2 icon chip"/>
+          <p:cNvSpPr/>
+          <p:nvPr/>
+        </p:nvSpPr>
+        <p:spPr>
+          <a:xfrm>
+            <a:off x="3459480" y="3108960"/>
+            <a:ext cx="384048" cy="384048"/>
+          </a:xfrm>
+          <a:prstGeom prst="ellipse">
+            <a:avLst/>
+          </a:prstGeom>
+          <a:solidFill>
+            <a:srgbClr val="DA1B2E"/>
+          </a:solidFill>
+          <a:ln>
+            <a:noFill/>
+          </a:ln>
+        </p:spPr>
+        <p:txBody>
+          <a:bodyPr lIns="0" tIns="0" rIns="0" bIns="0" wrap="square"/>
+          <a:lstStyle/>
+          <a:p/>
+        </p:txBody>
+      </p:sp>
+      <p:sp>
+        <p:nvSpPr>
+          <p:cNvPr id="12" name="Card 2 icon glyph (stand-in)"/>
+          <p:cNvSpPr/>
+          <p:nvPr/>
+        </p:nvSpPr>
+        <p:spPr>
+          <a:xfrm>
+            <a:off x="3555492" y="3204972"/>
+            <a:ext cx="192024" cy="192024"/>
+          </a:xfrm>
+          <a:prstGeom prst="ellipse">
+            <a:avLst/>
+          </a:prstGeom>
+          <a:noFill/>
+          <a:ln w="19050">
+            <a:solidFill>
+              <a:srgbClr val="FFFFFF"/>
+            </a:solidFill>
+          </a:ln>
+        </p:spPr>
+        <p:txBody>
+          <a:bodyPr lIns="0" tIns="0" rIns="0" bIns="0" wrap="square"/>
+          <a:lstStyle/>
+          <a:p/>
+        </p:txBody>
+      </p:sp>
+      <p:sp>
+        <p:nvSpPr>
+          <p:cNvPr id="13" name="Card 2 heading"/>
+          <p:cNvSpPr/>
+          <p:nvPr/>
+        </p:nvSpPr>
+        <p:spPr>
+          <a:xfrm>
+            <a:off x="3459480" y="3657600"/>
+            <a:ext cx="2215896" cy="274320"/>
+          </a:xfrm>
+          <a:prstGeom prst="rect">
+            <a:avLst/>
+          </a:prstGeom>
+          <a:noFill/>
+          <a:ln>
+            <a:noFill/>
+          </a:ln>
+        </p:spPr>
+        <p:txBody>
+          <a:bodyPr lIns="0" tIns="0" rIns="0" bIns="0" wrap="square" anchor="t"/>
+          <a:lstStyle/>
+          <a:p>
+            <a:pPr algn="l"/>
+            <a:r>
+              <a:rPr lang="es-ES" sz="1350" dirty="0">
+                <a:solidFill>
+                  <a:srgbClr val="1F1E1E"/>
+                </a:solidFill>
+                <a:latin typeface="Roboto Mono Medium"/>
+              </a:rPr>
+              <a:t>{{Card heading 2}}</a:t>
+            </a:r>
+          </a:p>
+        </p:txBody>
+      </p:sp>
+      <p:sp>
+        <p:nvSpPr>
+          <p:cNvPr id="14" name="Card 2 body"/>
+          <p:cNvSpPr/>
+          <p:nvPr/>
+        </p:nvSpPr>
+        <p:spPr>
+          <a:xfrm>
+            <a:off x="3459480" y="3977640"/>
+            <a:ext cx="2215896" cy="548640"/>
+          </a:xfrm>
+          <a:prstGeom prst="rect">
+            <a:avLst/>
+          </a:prstGeom>
+          <a:noFill/>
+          <a:ln>
+            <a:noFill/>
+          </a:ln>
+        </p:spPr>
+        <p:txBody>
+          <a:bodyPr lIns="0" tIns="0" rIns="0" bIns="0" wrap="square" anchor="t"/>
+          <a:lstStyle/>
+          <a:p>
+            <a:pPr algn="l"/>
+            <a:r>
+              <a:rPr lang="es-ES" sz="1100" dirty="0">
+                <a:solidFill>
+                  <a:srgbClr val="3B3535"/>
+                </a:solidFill>
+                <a:latin typeface="Roboto"/>
+              </a:rPr>
+              <a:t>{{Card body 2 — 1–2 short sentences.}}</a:t>
+            </a:r>
+          </a:p>
+        </p:txBody>
+      </p:sp>
+      <p:sp>
+        <p:nvSpPr>
+          <p:cNvPr id="15" name="Card 3 outer"/>
+          <p:cNvSpPr/>
+          <p:nvPr/>
+        </p:nvSpPr>
+        <p:spPr>
+          <a:xfrm>
+            <a:off x="6059424" y="2926080"/>
+            <a:ext cx="2581656" cy="1691640"/>
+          </a:xfrm>
+          <a:prstGeom prst="roundRect">
+            <a:avLst>
+              <a:gd name="adj" fmla="val 340"/>
+            </a:avLst>
+          </a:prstGeom>
+          <a:solidFill>
+            <a:srgbClr val="F2EEEE"/>
+          </a:solidFill>
+          <a:ln>
+            <a:noFill/>
+          </a:ln>
+        </p:spPr>
+        <p:txBody>
+          <a:bodyPr lIns="0" tIns="0" rIns="0" bIns="0" wrap="square"/>
+          <a:lstStyle/>
+          <a:p/>
+        </p:txBody>
+      </p:sp>
+      <p:sp>
+        <p:nvSpPr>
+          <p:cNvPr id="16" name="Card 3 icon chip"/>
+          <p:cNvSpPr/>
+          <p:nvPr/>
+        </p:nvSpPr>
+        <p:spPr>
+          <a:xfrm>
+            <a:off x="6242304" y="3108960"/>
+            <a:ext cx="384048" cy="384048"/>
+          </a:xfrm>
+          <a:prstGeom prst="ellipse">
+            <a:avLst/>
+          </a:prstGeom>
+          <a:solidFill>
+            <a:srgbClr val="DA1B2E"/>
+          </a:solidFill>
+          <a:ln>
+            <a:noFill/>
+          </a:ln>
+        </p:spPr>
+        <p:txBody>
+          <a:bodyPr lIns="0" tIns="0" rIns="0" bIns="0" wrap="square"/>
+          <a:lstStyle/>
+          <a:p/>
+        </p:txBody>
+      </p:sp>
+      <p:sp>
+        <p:nvSpPr>
+          <p:cNvPr id="17" name="Card 3 icon glyph (stand-in)"/>
+          <p:cNvSpPr/>
+          <p:nvPr/>
+        </p:nvSpPr>
+        <p:spPr>
+          <a:xfrm>
+            <a:off x="6338316" y="3204972"/>
+            <a:ext cx="192024" cy="192024"/>
+          </a:xfrm>
+          <a:prstGeom prst="ellipse">
+            <a:avLst/>
+          </a:prstGeom>
+          <a:noFill/>
+          <a:ln w="19050">
+            <a:solidFill>
+              <a:srgbClr val="FFFFFF"/>
+            </a:solidFill>
+          </a:ln>
+        </p:spPr>
+        <p:txBody>
+          <a:bodyPr lIns="0" tIns="0" rIns="0" bIns="0" wrap="square"/>
+          <a:lstStyle/>
+          <a:p/>
+        </p:txBody>
+      </p:sp>
+      <p:sp>
+        <p:nvSpPr>
+          <p:cNvPr id="18" name="Card 3 heading"/>
+          <p:cNvSpPr/>
+          <p:nvPr/>
+        </p:nvSpPr>
+        <p:spPr>
+          <a:xfrm>
+            <a:off x="6242304" y="3657600"/>
+            <a:ext cx="2215896" cy="274320"/>
+          </a:xfrm>
+          <a:prstGeom prst="rect">
+            <a:avLst/>
+          </a:prstGeom>
+          <a:noFill/>
+          <a:ln>
+            <a:noFill/>
+          </a:ln>
+        </p:spPr>
+        <p:txBody>
+          <a:bodyPr lIns="0" tIns="0" rIns="0" bIns="0" wrap="square" anchor="t"/>
+          <a:lstStyle/>
+          <a:p>
+            <a:pPr algn="l"/>
+            <a:r>
+              <a:rPr lang="es-ES" sz="1350" dirty="0">
+                <a:solidFill>
+                  <a:srgbClr val="1F1E1E"/>
+                </a:solidFill>
+                <a:latin typeface="Roboto Mono Medium"/>
+              </a:rPr>
+              <a:t>{{Card heading 3}}</a:t>
+            </a:r>
+          </a:p>
+        </p:txBody>
+      </p:sp>
+      <p:sp>
+        <p:nvSpPr>
+          <p:cNvPr id="19" name="Card 3 body"/>
+          <p:cNvSpPr/>
+          <p:nvPr/>
+        </p:nvSpPr>
+        <p:spPr>
+          <a:xfrm>
+            <a:off x="6242304" y="3977640"/>
+            <a:ext cx="2215896" cy="548640"/>
+          </a:xfrm>
+          <a:prstGeom prst="rect">
+            <a:avLst/>
+          </a:prstGeom>
+          <a:noFill/>
+          <a:ln>
+            <a:noFill/>
+          </a:ln>
+        </p:spPr>
+        <p:txBody>
+          <a:bodyPr lIns="0" tIns="0" rIns="0" bIns="0" wrap="square" anchor="t"/>
+          <a:lstStyle/>
+          <a:p>
+            <a:pPr algn="l"/>
+            <a:r>
+              <a:rPr lang="es-ES" sz="1100" dirty="0">
+                <a:solidFill>
+                  <a:srgbClr val="3B3535"/>
+                </a:solidFill>
+                <a:latin typeface="Roboto"/>
+              </a:rPr>
+              <a:t>{{Card body 3 — 1–2 short sentences.}}</a:t>
+            </a:r>
+          </a:p>
+        </p:txBody>
+      </p:sp>
+      <p:sp>
+        <p:nvSpPr>
+          <p:cNvPr id="20" name="Source line"/>
+          <p:cNvSpPr/>
+          <p:nvPr/>
+        </p:nvSpPr>
+        <p:spPr>
+          <a:xfrm>
+            <a:off x="493776" y="4846320"/>
+            <a:ext cx="8147304" cy="182880"/>
+          </a:xfrm>
+          <a:prstGeom prst="rect">
+            <a:avLst/>
+          </a:prstGeom>
+          <a:noFill/>
+          <a:ln>
+            <a:noFill/>
+          </a:ln>
+        </p:spPr>
+        <p:txBody>
+          <a:bodyPr lIns="0" tIns="0" rIns="0" bIns="0" wrap="square" anchor="t"/>
+          <a:lstStyle/>
+          <a:p>
+            <a:pPr algn="l"/>
+            <a:r>
+              <a:rPr lang="es-ES" sz="900" i="1" dirty="0">
+                <a:solidFill>
+                  <a:srgbClr val="6A737D"/>
+                </a:solidFill>
+                <a:latin typeface="Roboto"/>
+              </a:rPr>
+              <a:t>{{Fuente: &lt;source title&gt; — optional, omit when content is synthesized}}</a:t>
+            </a:r>
+          </a:p>
+        </p:txBody>
+      </p:sp>
+    </p:spTree>
+  </p:cSld>
+  <p:clrMapOvr>
+    <a:masterClrMapping/>
+  </p:clrMapOvr>
+</p:sld>
+</file>
+
+<file path=ppt/slides/slide15.xml><?xml version="1.0" encoding="utf-8"?>
+<p:sld xmlns:a="http://schemas.openxmlformats.org/drawingml/2006/main" xmlns:r="http://schemas.openxmlformats.org/officeDocument/2006/relationships" xmlns:p="http://schemas.openxmlformats.org/presentationml/2006/main">
+  <p:cSld>
+    <p:spTree>
+      <p:nvGrpSpPr>
+        <p:cNvPr id="1" name=""/>
+        <p:cNvGrpSpPr/>
+        <p:nvPr/>
+      </p:nvGrpSpPr>
+      <p:grpSpPr>
+        <a:xfrm>
+          <a:off x="0" y="0"/>
+          <a:ext cx="0" cy="0"/>
+          <a:chOff x="0" y="0"/>
+          <a:chExt cx="0" cy="0"/>
+        </a:xfrm>
+      </p:grpSpPr>
+      <p:sp>
+        <p:nvSpPr>
+          <p:cNvPr id="2" name="Section pill"/>
+          <p:cNvSpPr/>
+          <p:nvPr/>
+        </p:nvSpPr>
+        <p:spPr>
+          <a:xfrm>
+            <a:off x="384048" y="292608"/>
+            <a:ext cx="3840480" cy="274320"/>
+          </a:xfrm>
+          <a:prstGeom prst="roundRect">
+            <a:avLst>
+              <a:gd name="adj" fmla="val 2100"/>
+            </a:avLst>
+          </a:prstGeom>
+          <a:solidFill>
+            <a:srgbClr val="F9D2D6"/>
+          </a:solidFill>
+          <a:ln>
+            <a:noFill/>
+          </a:ln>
+        </p:spPr>
+        <p:txBody>
+          <a:bodyPr lIns="0" tIns="0" rIns="0" bIns="0" wrap="square" anchor="t"/>
+          <a:lstStyle/>
+          <a:p>
+            <a:pPr algn="l"/>
+            <a:r>
+              <a:rPr lang="es-ES" sz="950" dirty="0">
+                <a:solidFill>
+                  <a:srgbClr val="1F1E1E"/>
+                </a:solidFill>
+                <a:latin typeface="Roboto Mono Medium"/>
+              </a:rPr>
+              <a:t>TEMPLATE — ICON-BULLET LIST (LEAD + 3 ITEMS)</a:t>
+            </a:r>
+          </a:p>
+        </p:txBody>
+      </p:sp>
+      <p:sp>
+        <p:nvSpPr>
+          <p:cNvPr id="3" name="Title"/>
+          <p:cNvSpPr/>
+          <p:nvPr/>
+        </p:nvSpPr>
+        <p:spPr>
+          <a:xfrm>
+            <a:off x="493776" y="777240"/>
+            <a:ext cx="8147304" cy="960120"/>
+          </a:xfrm>
+          <a:prstGeom prst="rect">
+            <a:avLst/>
+          </a:prstGeom>
+          <a:noFill/>
+          <a:ln>
+            <a:noFill/>
+          </a:ln>
+        </p:spPr>
+        <p:txBody>
+          <a:bodyPr lIns="0" tIns="0" rIns="0" bIns="0" wrap="square" anchor="t"/>
+          <a:lstStyle/>
+          <a:p>
+            <a:pPr algn="l"/>
+            <a:r>
+              <a:rPr lang="es-ES" sz="2800" dirty="0">
+                <a:solidFill>
+                  <a:srgbClr val="1F1E1E"/>
+                </a:solidFill>
+                <a:latin typeface="Roboto Mono Medium"/>
+              </a:rPr>
+              <a:t>{{Slide title (h2) 15}}</a:t>
+            </a:r>
+          </a:p>
+        </p:txBody>
+      </p:sp>
+      <p:sp>
+        <p:nvSpPr>
+          <p:cNvPr id="4" name="Lead paragraph"/>
+          <p:cNvSpPr/>
+          <p:nvPr/>
+        </p:nvSpPr>
+        <p:spPr>
+          <a:xfrm>
+            <a:off x="493776" y="1874520"/>
+            <a:ext cx="8147304" cy="777240"/>
+          </a:xfrm>
+          <a:prstGeom prst="rect">
+            <a:avLst/>
+          </a:prstGeom>
+          <a:noFill/>
+          <a:ln>
+            <a:noFill/>
+          </a:ln>
+        </p:spPr>
+        <p:txBody>
+          <a:bodyPr lIns="0" tIns="0" rIns="0" bIns="0" wrap="square" anchor="t"/>
+          <a:lstStyle/>
+          <a:p>
+            <a:pPr algn="l"/>
+            <a:r>
+              <a:rPr lang="es-ES" sz="1200" dirty="0">
+                <a:solidFill>
+                  <a:srgbClr val="3B3535"/>
+                </a:solidFill>
+                <a:latin typeface="Roboto"/>
+              </a:rPr>
+              <a:t>{{Lead paragraph 15 — 1–2 sentences (inline **bold** supported) framing the items that follow as a vertical stack with line-art icons. Source spec: §7.5.}}</a:t>
+            </a:r>
+          </a:p>
+        </p:txBody>
+      </p:sp>
+      <p:sp>
+        <p:nvSpPr>
+          <p:cNvPr id="5" name="Row 1 icon (stand-in)"/>
+          <p:cNvSpPr/>
+          <p:nvPr/>
+        </p:nvSpPr>
+        <p:spPr>
+          <a:xfrm>
+            <a:off x="493776" y="2871216"/>
+            <a:ext cx="384048" cy="384048"/>
+          </a:xfrm>
+          <a:prstGeom prst="ellipse">
+            <a:avLst/>
+          </a:prstGeom>
+          <a:noFill/>
+          <a:ln w="25400">
+            <a:solidFill>
+              <a:srgbClr val="DA1B2E"/>
+            </a:solidFill>
+          </a:ln>
+        </p:spPr>
+        <p:txBody>
+          <a:bodyPr lIns="0" tIns="0" rIns="0" bIns="0" wrap="square"/>
+          <a:lstStyle/>
+          <a:p/>
+        </p:txBody>
+      </p:sp>
+      <p:sp>
+        <p:nvSpPr>
+          <p:cNvPr id="6" name="Row 1 heading"/>
+          <p:cNvSpPr/>
+          <p:nvPr/>
+        </p:nvSpPr>
+        <p:spPr>
+          <a:xfrm>
+            <a:off x="1060704" y="2880360"/>
+            <a:ext cx="7086600" cy="274320"/>
+          </a:xfrm>
+          <a:prstGeom prst="rect">
+            <a:avLst/>
+          </a:prstGeom>
+          <a:noFill/>
+          <a:ln>
+            <a:noFill/>
+          </a:ln>
+        </p:spPr>
+        <p:txBody>
+          <a:bodyPr lIns="0" tIns="0" rIns="0" bIns="0" wrap="square" anchor="t"/>
+          <a:lstStyle/>
+          <a:p>
+            <a:pPr algn="l"/>
+            <a:r>
+              <a:rPr lang="es-ES" sz="1350" dirty="0">
+                <a:solidFill>
+                  <a:srgbClr val="1F1E1E"/>
+                </a:solidFill>
+                <a:latin typeface="Roboto Mono Medium"/>
+              </a:rPr>
+              <a:t>{{Row heading 1}}</a:t>
+            </a:r>
+          </a:p>
+        </p:txBody>
+      </p:sp>
+      <p:sp>
+        <p:nvSpPr>
+          <p:cNvPr id="7" name="Row 1 body"/>
+          <p:cNvSpPr/>
+          <p:nvPr/>
+        </p:nvSpPr>
+        <p:spPr>
+          <a:xfrm>
+            <a:off x="1060704" y="3200400"/>
+            <a:ext cx="7086600" cy="266700"/>
+          </a:xfrm>
+          <a:prstGeom prst="rect">
+            <a:avLst/>
+          </a:prstGeom>
+          <a:noFill/>
+          <a:ln>
+            <a:noFill/>
+          </a:ln>
+        </p:spPr>
+        <p:txBody>
+          <a:bodyPr lIns="0" tIns="0" rIns="0" bIns="0" wrap="square" anchor="t"/>
+          <a:lstStyle/>
+          <a:p>
+            <a:pPr algn="l"/>
+            <a:r>
+              <a:rPr lang="es-ES" sz="1100" dirty="0">
+                <a:solidFill>
+                  <a:srgbClr val="3B3535"/>
+                </a:solidFill>
+                <a:latin typeface="Roboto"/>
+              </a:rPr>
+              <a:t>{{Row body 1 — 2–3 sentences of prose. Each item gets real horizontal room so the reader can absorb the explanation.}}</a:t>
+            </a:r>
+          </a:p>
+        </p:txBody>
+      </p:sp>
+      <p:sp>
+        <p:nvSpPr>
+          <p:cNvPr id="8" name="Row 2 icon (stand-in)"/>
+          <p:cNvSpPr/>
+          <p:nvPr/>
+        </p:nvSpPr>
+        <p:spPr>
+          <a:xfrm>
+            <a:off x="493776" y="3549396"/>
+            <a:ext cx="384048" cy="384048"/>
+          </a:xfrm>
+          <a:prstGeom prst="ellipse">
+            <a:avLst/>
+          </a:prstGeom>
+          <a:noFill/>
+          <a:ln w="25400">
+            <a:solidFill>
+              <a:srgbClr val="DA1B2E"/>
+            </a:solidFill>
+          </a:ln>
+        </p:spPr>
+        <p:txBody>
+          <a:bodyPr lIns="0" tIns="0" rIns="0" bIns="0" wrap="square"/>
+          <a:lstStyle/>
+          <a:p/>
+        </p:txBody>
+      </p:sp>
+      <p:sp>
+        <p:nvSpPr>
+          <p:cNvPr id="9" name="Row 2 heading"/>
+          <p:cNvSpPr/>
+          <p:nvPr/>
+        </p:nvSpPr>
+        <p:spPr>
+          <a:xfrm>
+            <a:off x="1060704" y="3558540"/>
+            <a:ext cx="7086600" cy="274320"/>
+          </a:xfrm>
+          <a:prstGeom prst="rect">
+            <a:avLst/>
+          </a:prstGeom>
+          <a:noFill/>
+          <a:ln>
+            <a:noFill/>
+          </a:ln>
+        </p:spPr>
+        <p:txBody>
+          <a:bodyPr lIns="0" tIns="0" rIns="0" bIns="0" wrap="square" anchor="t"/>
+          <a:lstStyle/>
+          <a:p>
+            <a:pPr algn="l"/>
+            <a:r>
+              <a:rPr lang="es-ES" sz="1350" dirty="0">
+                <a:solidFill>
+                  <a:srgbClr val="1F1E1E"/>
+                </a:solidFill>
+                <a:latin typeface="Roboto Mono Medium"/>
+              </a:rPr>
+              <a:t>{{Row heading 2}}</a:t>
+            </a:r>
+          </a:p>
+        </p:txBody>
+      </p:sp>
+      <p:sp>
+        <p:nvSpPr>
+          <p:cNvPr id="10" name="Row 2 body"/>
+          <p:cNvSpPr/>
+          <p:nvPr/>
+        </p:nvSpPr>
+        <p:spPr>
+          <a:xfrm>
+            <a:off x="1060704" y="3878580"/>
+            <a:ext cx="7086600" cy="266700"/>
+          </a:xfrm>
+          <a:prstGeom prst="rect">
+            <a:avLst/>
+          </a:prstGeom>
+          <a:noFill/>
+          <a:ln>
+            <a:noFill/>
+          </a:ln>
+        </p:spPr>
+        <p:txBody>
+          <a:bodyPr lIns="0" tIns="0" rIns="0" bIns="0" wrap="square" anchor="t"/>
+          <a:lstStyle/>
+          <a:p>
+            <a:pPr algn="l"/>
+            <a:r>
+              <a:rPr lang="es-ES" sz="1100" dirty="0">
+                <a:solidFill>
+                  <a:srgbClr val="3B3535"/>
+                </a:solidFill>
+                <a:latin typeface="Roboto"/>
+              </a:rPr>
+              <a:t>{{Row body 2 — 2–3 sentences of prose. Each item gets real horizontal room so the reader can absorb the explanation.}}</a:t>
+            </a:r>
+          </a:p>
+        </p:txBody>
+      </p:sp>
+      <p:sp>
+        <p:nvSpPr>
+          <p:cNvPr id="11" name="Row 3 icon (stand-in)"/>
+          <p:cNvSpPr/>
+          <p:nvPr/>
+        </p:nvSpPr>
+        <p:spPr>
+          <a:xfrm>
+            <a:off x="493776" y="4227576"/>
+            <a:ext cx="384048" cy="384048"/>
+          </a:xfrm>
+          <a:prstGeom prst="ellipse">
+            <a:avLst/>
+          </a:prstGeom>
+          <a:noFill/>
+          <a:ln w="25400">
+            <a:solidFill>
+              <a:srgbClr val="DA1B2E"/>
+            </a:solidFill>
+          </a:ln>
+        </p:spPr>
+        <p:txBody>
+          <a:bodyPr lIns="0" tIns="0" rIns="0" bIns="0" wrap="square"/>
+          <a:lstStyle/>
+          <a:p/>
+        </p:txBody>
+      </p:sp>
+      <p:sp>
+        <p:nvSpPr>
+          <p:cNvPr id="12" name="Row 3 heading"/>
+          <p:cNvSpPr/>
+          <p:nvPr/>
+        </p:nvSpPr>
+        <p:spPr>
+          <a:xfrm>
+            <a:off x="1060704" y="4236720"/>
+            <a:ext cx="7086600" cy="274320"/>
+          </a:xfrm>
+          <a:prstGeom prst="rect">
+            <a:avLst/>
+          </a:prstGeom>
+          <a:noFill/>
+          <a:ln>
+            <a:noFill/>
+          </a:ln>
+        </p:spPr>
+        <p:txBody>
+          <a:bodyPr lIns="0" tIns="0" rIns="0" bIns="0" wrap="square" anchor="t"/>
+          <a:lstStyle/>
+          <a:p>
+            <a:pPr algn="l"/>
+            <a:r>
+              <a:rPr lang="es-ES" sz="1350" dirty="0">
+                <a:solidFill>
+                  <a:srgbClr val="1F1E1E"/>
+                </a:solidFill>
+                <a:latin typeface="Roboto Mono Medium"/>
+              </a:rPr>
+              <a:t>{{Row heading 3}}</a:t>
+            </a:r>
+          </a:p>
+        </p:txBody>
+      </p:sp>
+      <p:sp>
+        <p:nvSpPr>
+          <p:cNvPr id="13" name="Row 3 body"/>
+          <p:cNvSpPr/>
+          <p:nvPr/>
+        </p:nvSpPr>
+        <p:spPr>
+          <a:xfrm>
+            <a:off x="1060704" y="4556760"/>
+            <a:ext cx="7086600" cy="266700"/>
+          </a:xfrm>
+          <a:prstGeom prst="rect">
+            <a:avLst/>
+          </a:prstGeom>
+          <a:noFill/>
+          <a:ln>
+            <a:noFill/>
+          </a:ln>
+        </p:spPr>
+        <p:txBody>
+          <a:bodyPr lIns="0" tIns="0" rIns="0" bIns="0" wrap="square" anchor="t"/>
+          <a:lstStyle/>
+          <a:p>
+            <a:pPr algn="l"/>
+            <a:r>
+              <a:rPr lang="es-ES" sz="1100" dirty="0">
+                <a:solidFill>
+                  <a:srgbClr val="3B3535"/>
+                </a:solidFill>
+                <a:latin typeface="Roboto"/>
+              </a:rPr>
+              <a:t>{{Row body 3 — 2–3 sentences of prose. Each item gets real horizontal room so the reader can absorb the explanation.}}</a:t>
+            </a:r>
+          </a:p>
+        </p:txBody>
+      </p:sp>
+      <p:sp>
+        <p:nvSpPr>
+          <p:cNvPr id="14" name="Source line"/>
+          <p:cNvSpPr/>
+          <p:nvPr/>
+        </p:nvSpPr>
+        <p:spPr>
+          <a:xfrm>
+            <a:off x="493776" y="4846320"/>
+            <a:ext cx="8147304" cy="182880"/>
+          </a:xfrm>
+          <a:prstGeom prst="rect">
+            <a:avLst/>
+          </a:prstGeom>
+          <a:noFill/>
+          <a:ln>
+            <a:noFill/>
+          </a:ln>
+        </p:spPr>
+        <p:txBody>
+          <a:bodyPr lIns="0" tIns="0" rIns="0" bIns="0" wrap="square" anchor="t"/>
+          <a:lstStyle/>
+          <a:p>
+            <a:pPr algn="l"/>
+            <a:r>
+              <a:rPr lang="es-ES" sz="900" i="1" dirty="0">
+                <a:solidFill>
+                  <a:srgbClr val="6A737D"/>
+                </a:solidFill>
+                <a:latin typeface="Roboto"/>
+              </a:rPr>
+              <a:t>{{Fuente: &lt;source title&gt; — optional}}</a:t>
+            </a:r>
+          </a:p>
+        </p:txBody>
+      </p:sp>
+    </p:spTree>
+  </p:cSld>
+  <p:clrMapOvr>
+    <a:masterClrMapping/>
+  </p:clrMapOvr>
+</p:sld>
+</file>
+
 <file path=ppt/slides/slide2.xml><?xml version="1.0" encoding="utf-8"?>
 <p:sld xmlns:a="http://schemas.openxmlformats.org/drawingml/2006/main" xmlns:r="http://schemas.openxmlformats.org/officeDocument/2006/relationships" xmlns:p="http://schemas.openxmlformats.org/presentationml/2006/main">
   <p:cSld name="Slide 2">

--- a/config/base-template.pptx
+++ b/config/base-template.pptx
@@ -1456,9 +1456,11 @@
 <p:sldLayout xmlns:a="http://schemas.openxmlformats.org/drawingml/2006/main" xmlns:r="http://schemas.openxmlformats.org/officeDocument/2006/relationships" xmlns:p="http://schemas.openxmlformats.org/presentationml/2006/main" preserve="1">
   <p:cSld name="DEFAULT">
     <p:bg>
-      <p:bgRef idx="1001">
-        <a:schemeClr val="bg1"/>
-      </p:bgRef>
+      <p:bgPr>
+        <a:solidFill>
+          <a:srgbClr val="FFFFFF"/>
+        </a:solidFill>
+      </p:bgPr>
     </p:bg>
     <p:spTree>
       <p:nvGrpSpPr>
@@ -1488,7 +1490,7 @@
     <p:bg>
       <p:bgPr>
         <a:solidFill>
-          <a:srgbClr val="000000"/>
+          <a:srgbClr val="FFFFFF"/>
         </a:solidFill>
       </p:bgPr>
     </p:bg>
@@ -1506,28 +1508,6 @@
           <a:chExt cx="0" cy="0"/>
         </a:xfrm>
       </p:grpSpPr>
-      <p:sp>
-        <p:nvSpPr>
-          <p:cNvPr id="2" name="Shape 0"/>
-          <p:cNvSpPr/>
-          <p:nvPr/>
-        </p:nvSpPr>
-        <p:spPr>
-          <a:xfrm>
-            <a:off x="0" y="0"/>
-            <a:ext cx="9144000" cy="5143500"/>
-          </a:xfrm>
-          <a:prstGeom prst="rect">
-            <a:avLst/>
-          </a:prstGeom>
-          <a:solidFill>
-            <a:srgbClr val="FFFFFF">
-              <a:alpha val="95000"/>
-            </a:srgbClr>
-          </a:solidFill>
-          <a:ln/>
-        </p:spPr>
-      </p:sp>
     </p:spTree>
   </p:cSld>
   <p:clrMapOvr>
@@ -1542,7 +1522,7 @@
     <p:bg>
       <p:bgPr>
         <a:solidFill>
-          <a:srgbClr val="000000"/>
+          <a:srgbClr val="FFFFFF"/>
         </a:solidFill>
       </p:bgPr>
     </p:bg>
@@ -1560,28 +1540,6 @@
           <a:chExt cx="0" cy="0"/>
         </a:xfrm>
       </p:grpSpPr>
-      <p:sp>
-        <p:nvSpPr>
-          <p:cNvPr id="2" name="Shape 0"/>
-          <p:cNvSpPr/>
-          <p:nvPr/>
-        </p:nvSpPr>
-        <p:spPr>
-          <a:xfrm>
-            <a:off x="0" y="0"/>
-            <a:ext cx="9144000" cy="5143500"/>
-          </a:xfrm>
-          <a:prstGeom prst="rect">
-            <a:avLst/>
-          </a:prstGeom>
-          <a:solidFill>
-            <a:srgbClr val="FFFFFF">
-              <a:alpha val="95000"/>
-            </a:srgbClr>
-          </a:solidFill>
-          <a:ln/>
-        </p:spPr>
-      </p:sp>
     </p:spTree>
   </p:cSld>
   <p:clrMapOvr>
@@ -1596,7 +1554,7 @@
     <p:bg>
       <p:bgPr>
         <a:solidFill>
-          <a:srgbClr val="000000"/>
+          <a:srgbClr val="FFFFFF"/>
         </a:solidFill>
       </p:bgPr>
     </p:bg>
@@ -1614,28 +1572,6 @@
           <a:chExt cx="0" cy="0"/>
         </a:xfrm>
       </p:grpSpPr>
-      <p:sp>
-        <p:nvSpPr>
-          <p:cNvPr id="2" name="Shape 0"/>
-          <p:cNvSpPr/>
-          <p:nvPr/>
-        </p:nvSpPr>
-        <p:spPr>
-          <a:xfrm>
-            <a:off x="0" y="0"/>
-            <a:ext cx="9144000" cy="5143500"/>
-          </a:xfrm>
-          <a:prstGeom prst="rect">
-            <a:avLst/>
-          </a:prstGeom>
-          <a:solidFill>
-            <a:srgbClr val="FFFFFF">
-              <a:alpha val="95000"/>
-            </a:srgbClr>
-          </a:solidFill>
-          <a:ln/>
-        </p:spPr>
-      </p:sp>
     </p:spTree>
   </p:cSld>
   <p:clrMapOvr>
@@ -1650,7 +1586,7 @@
     <p:bg>
       <p:bgPr>
         <a:solidFill>
-          <a:srgbClr val="000000"/>
+          <a:srgbClr val="FFFFFF"/>
         </a:solidFill>
       </p:bgPr>
     </p:bg>
@@ -1668,28 +1604,6 @@
           <a:chExt cx="0" cy="0"/>
         </a:xfrm>
       </p:grpSpPr>
-      <p:sp>
-        <p:nvSpPr>
-          <p:cNvPr id="2" name="Shape 0"/>
-          <p:cNvSpPr/>
-          <p:nvPr/>
-        </p:nvSpPr>
-        <p:spPr>
-          <a:xfrm>
-            <a:off x="0" y="0"/>
-            <a:ext cx="9144000" cy="5143500"/>
-          </a:xfrm>
-          <a:prstGeom prst="rect">
-            <a:avLst/>
-          </a:prstGeom>
-          <a:solidFill>
-            <a:srgbClr val="FFFFFF">
-              <a:alpha val="95000"/>
-            </a:srgbClr>
-          </a:solidFill>
-          <a:ln/>
-        </p:spPr>
-      </p:sp>
     </p:spTree>
   </p:cSld>
   <p:clrMapOvr>
@@ -1704,7 +1618,7 @@
     <p:bg>
       <p:bgPr>
         <a:solidFill>
-          <a:srgbClr val="000000"/>
+          <a:srgbClr val="FFFFFF"/>
         </a:solidFill>
       </p:bgPr>
     </p:bg>
@@ -1722,28 +1636,6 @@
           <a:chExt cx="0" cy="0"/>
         </a:xfrm>
       </p:grpSpPr>
-      <p:sp>
-        <p:nvSpPr>
-          <p:cNvPr id="2" name="Shape 0"/>
-          <p:cNvSpPr/>
-          <p:nvPr/>
-        </p:nvSpPr>
-        <p:spPr>
-          <a:xfrm>
-            <a:off x="0" y="0"/>
-            <a:ext cx="9144000" cy="5143500"/>
-          </a:xfrm>
-          <a:prstGeom prst="rect">
-            <a:avLst/>
-          </a:prstGeom>
-          <a:solidFill>
-            <a:srgbClr val="FFFFFF">
-              <a:alpha val="95000"/>
-            </a:srgbClr>
-          </a:solidFill>
-          <a:ln/>
-        </p:spPr>
-      </p:sp>
     </p:spTree>
   </p:cSld>
   <p:clrMapOvr>
@@ -1758,7 +1650,7 @@
     <p:bg>
       <p:bgPr>
         <a:solidFill>
-          <a:srgbClr val="000000"/>
+          <a:srgbClr val="FFFFFF"/>
         </a:solidFill>
       </p:bgPr>
     </p:bg>
@@ -1776,28 +1668,6 @@
           <a:chExt cx="0" cy="0"/>
         </a:xfrm>
       </p:grpSpPr>
-      <p:sp>
-        <p:nvSpPr>
-          <p:cNvPr id="2" name="Shape 0"/>
-          <p:cNvSpPr/>
-          <p:nvPr/>
-        </p:nvSpPr>
-        <p:spPr>
-          <a:xfrm>
-            <a:off x="0" y="0"/>
-            <a:ext cx="9144000" cy="5143500"/>
-          </a:xfrm>
-          <a:prstGeom prst="rect">
-            <a:avLst/>
-          </a:prstGeom>
-          <a:solidFill>
-            <a:srgbClr val="FFFFFF">
-              <a:alpha val="95000"/>
-            </a:srgbClr>
-          </a:solidFill>
-          <a:ln/>
-        </p:spPr>
-      </p:sp>
     </p:spTree>
   </p:cSld>
   <p:clrMapOvr>
@@ -1812,7 +1682,7 @@
     <p:bg>
       <p:bgPr>
         <a:solidFill>
-          <a:srgbClr val="000000"/>
+          <a:srgbClr val="FFFFFF"/>
         </a:solidFill>
       </p:bgPr>
     </p:bg>
@@ -1830,28 +1700,6 @@
           <a:chExt cx="0" cy="0"/>
         </a:xfrm>
       </p:grpSpPr>
-      <p:sp>
-        <p:nvSpPr>
-          <p:cNvPr id="2" name="Shape 0"/>
-          <p:cNvSpPr/>
-          <p:nvPr/>
-        </p:nvSpPr>
-        <p:spPr>
-          <a:xfrm>
-            <a:off x="0" y="0"/>
-            <a:ext cx="9144000" cy="5143500"/>
-          </a:xfrm>
-          <a:prstGeom prst="rect">
-            <a:avLst/>
-          </a:prstGeom>
-          <a:solidFill>
-            <a:srgbClr val="FFFFFF">
-              <a:alpha val="95000"/>
-            </a:srgbClr>
-          </a:solidFill>
-          <a:ln/>
-        </p:spPr>
-      </p:sp>
     </p:spTree>
   </p:cSld>
   <p:clrMapOvr>
@@ -1866,7 +1714,7 @@
     <p:bg>
       <p:bgPr>
         <a:solidFill>
-          <a:srgbClr val="000000"/>
+          <a:srgbClr val="FFFFFF"/>
         </a:solidFill>
       </p:bgPr>
     </p:bg>
@@ -1884,28 +1732,6 @@
           <a:chExt cx="0" cy="0"/>
         </a:xfrm>
       </p:grpSpPr>
-      <p:sp>
-        <p:nvSpPr>
-          <p:cNvPr id="2" name="Shape 0"/>
-          <p:cNvSpPr/>
-          <p:nvPr/>
-        </p:nvSpPr>
-        <p:spPr>
-          <a:xfrm>
-            <a:off x="0" y="0"/>
-            <a:ext cx="9144000" cy="5143500"/>
-          </a:xfrm>
-          <a:prstGeom prst="rect">
-            <a:avLst/>
-          </a:prstGeom>
-          <a:solidFill>
-            <a:srgbClr val="FFFFFF">
-              <a:alpha val="95000"/>
-            </a:srgbClr>
-          </a:solidFill>
-          <a:ln/>
-        </p:spPr>
-      </p:sp>
     </p:spTree>
   </p:cSld>
   <p:clrMapOvr>
@@ -1920,7 +1746,7 @@
     <p:bg>
       <p:bgPr>
         <a:solidFill>
-          <a:srgbClr val="000000"/>
+          <a:srgbClr val="FFFFFF"/>
         </a:solidFill>
       </p:bgPr>
     </p:bg>
@@ -1938,28 +1764,6 @@
           <a:chExt cx="0" cy="0"/>
         </a:xfrm>
       </p:grpSpPr>
-      <p:sp>
-        <p:nvSpPr>
-          <p:cNvPr id="2" name="Shape 0"/>
-          <p:cNvSpPr/>
-          <p:nvPr/>
-        </p:nvSpPr>
-        <p:spPr>
-          <a:xfrm>
-            <a:off x="0" y="0"/>
-            <a:ext cx="9144000" cy="5143500"/>
-          </a:xfrm>
-          <a:prstGeom prst="rect">
-            <a:avLst/>
-          </a:prstGeom>
-          <a:solidFill>
-            <a:srgbClr val="FFFFFF">
-              <a:alpha val="95000"/>
-            </a:srgbClr>
-          </a:solidFill>
-          <a:ln/>
-        </p:spPr>
-      </p:sp>
     </p:spTree>
   </p:cSld>
   <p:clrMapOvr>
@@ -1974,7 +1778,7 @@
     <p:bg>
       <p:bgPr>
         <a:solidFill>
-          <a:srgbClr val="000000"/>
+          <a:srgbClr val="FFFFFF"/>
         </a:solidFill>
       </p:bgPr>
     </p:bg>
@@ -1992,28 +1796,6 @@
           <a:chExt cx="0" cy="0"/>
         </a:xfrm>
       </p:grpSpPr>
-      <p:sp>
-        <p:nvSpPr>
-          <p:cNvPr id="2" name="Shape 0"/>
-          <p:cNvSpPr/>
-          <p:nvPr/>
-        </p:nvSpPr>
-        <p:spPr>
-          <a:xfrm>
-            <a:off x="0" y="0"/>
-            <a:ext cx="9144000" cy="5143500"/>
-          </a:xfrm>
-          <a:prstGeom prst="rect">
-            <a:avLst/>
-          </a:prstGeom>
-          <a:solidFill>
-            <a:srgbClr val="FFFFFF">
-              <a:alpha val="95000"/>
-            </a:srgbClr>
-          </a:solidFill>
-          <a:ln/>
-        </p:spPr>
-      </p:sp>
     </p:spTree>
   </p:cSld>
   <p:clrMapOvr>
@@ -2028,7 +1810,7 @@
     <p:bg>
       <p:bgPr>
         <a:solidFill>
-          <a:srgbClr val="000000"/>
+          <a:srgbClr val="FFFFFF"/>
         </a:solidFill>
       </p:bgPr>
     </p:bg>
@@ -2046,28 +1828,6 @@
           <a:chExt cx="0" cy="0"/>
         </a:xfrm>
       </p:grpSpPr>
-      <p:sp>
-        <p:nvSpPr>
-          <p:cNvPr id="2" name="Shape 0"/>
-          <p:cNvSpPr/>
-          <p:nvPr/>
-        </p:nvSpPr>
-        <p:spPr>
-          <a:xfrm>
-            <a:off x="0" y="0"/>
-            <a:ext cx="9144000" cy="5143500"/>
-          </a:xfrm>
-          <a:prstGeom prst="rect">
-            <a:avLst/>
-          </a:prstGeom>
-          <a:solidFill>
-            <a:srgbClr val="FFFFFF">
-              <a:alpha val="95000"/>
-            </a:srgbClr>
-          </a:solidFill>
-          <a:ln/>
-        </p:spPr>
-      </p:sp>
     </p:spTree>
   </p:cSld>
   <p:clrMapOvr>
@@ -2082,7 +1842,7 @@
     <p:bg>
       <p:bgPr>
         <a:solidFill>
-          <a:srgbClr val="000000"/>
+          <a:srgbClr val="FFFFFF"/>
         </a:solidFill>
       </p:bgPr>
     </p:bg>
@@ -2100,28 +1860,6 @@
           <a:chExt cx="0" cy="0"/>
         </a:xfrm>
       </p:grpSpPr>
-      <p:sp>
-        <p:nvSpPr>
-          <p:cNvPr id="2" name="Shape 0"/>
-          <p:cNvSpPr/>
-          <p:nvPr/>
-        </p:nvSpPr>
-        <p:spPr>
-          <a:xfrm>
-            <a:off x="0" y="0"/>
-            <a:ext cx="9144000" cy="5143500"/>
-          </a:xfrm>
-          <a:prstGeom prst="rect">
-            <a:avLst/>
-          </a:prstGeom>
-          <a:solidFill>
-            <a:srgbClr val="FFFFFF">
-              <a:alpha val="95000"/>
-            </a:srgbClr>
-          </a:solidFill>
-          <a:ln/>
-        </p:spPr>
-      </p:sp>
     </p:spTree>
   </p:cSld>
   <p:clrMapOvr>
@@ -2136,7 +1874,7 @@
     <p:bg>
       <p:bgPr>
         <a:solidFill>
-          <a:srgbClr val="000000"/>
+          <a:srgbClr val="FFFFFF"/>
         </a:solidFill>
       </p:bgPr>
     </p:bg>
@@ -2154,28 +1892,6 @@
           <a:chExt cx="0" cy="0"/>
         </a:xfrm>
       </p:grpSpPr>
-      <p:sp>
-        <p:nvSpPr>
-          <p:cNvPr id="2" name="Shape 0"/>
-          <p:cNvSpPr/>
-          <p:nvPr/>
-        </p:nvSpPr>
-        <p:spPr>
-          <a:xfrm>
-            <a:off x="0" y="0"/>
-            <a:ext cx="9144000" cy="5143500"/>
-          </a:xfrm>
-          <a:prstGeom prst="rect">
-            <a:avLst/>
-          </a:prstGeom>
-          <a:solidFill>
-            <a:srgbClr val="FFFFFF">
-              <a:alpha val="95000"/>
-            </a:srgbClr>
-          </a:solidFill>
-          <a:ln/>
-        </p:spPr>
-      </p:sp>
     </p:spTree>
   </p:cSld>
   <p:clrMapOvr>
